--- a/output_pptx/The_Stand.pptx
+++ b/output_pptx/The_Stand.pptx
@@ -3117,8 +3117,8 @@
         </p:nvSpPr>
         <p:spPr>
           <a:xfrm>
-            <a:off x="594360" y="2258568"/>
-            <a:ext cx="11002975" cy="685800"/>
+            <a:off x="640080" y="2052828"/>
+            <a:ext cx="10911535" cy="731520"/>
           </a:xfrm>
           <a:prstGeom prst="rect">
             <a:avLst/>
@@ -3133,7 +3133,7 @@
           <a:p>
             <a:pPr algn="ctr"/>
             <a:r>
-              <a:rPr sz="4400" b="1" i="0">
+              <a:rPr sz="4800" b="1" i="0">
                 <a:solidFill>
                   <a:srgbClr val="FFFFFF"/>
                 </a:solidFill>
@@ -3152,8 +3152,8 @@
         </p:nvSpPr>
         <p:spPr>
           <a:xfrm>
-            <a:off x="594360" y="2980944"/>
-            <a:ext cx="11002975" cy="347472"/>
+            <a:off x="640080" y="2985516"/>
+            <a:ext cx="10911535" cy="731520"/>
           </a:xfrm>
           <a:prstGeom prst="rect">
             <a:avLst/>
@@ -3168,83 +3168,13 @@
           <a:p>
             <a:pPr algn="ctr"/>
             <a:r>
-              <a:rPr sz="2200" b="0" i="1">
-                <a:solidFill>
-                  <a:srgbClr val="8C8C8C"/>
-                </a:solidFill>
-                <a:latin typeface="Arial"/>
-              </a:rPr>
-              <a:t/>
-            </a:r>
-          </a:p>
-        </p:txBody>
-      </p:sp>
-      <p:sp>
-        <p:nvSpPr>
-          <p:cNvPr id="4" name="TextBox 3"/>
-          <p:cNvSpPr txBox="1"/>
-          <p:nvPr/>
-        </p:nvSpPr>
-        <p:spPr>
-          <a:xfrm>
-            <a:off x="594360" y="3529584"/>
-            <a:ext cx="11002975" cy="685800"/>
-          </a:xfrm>
-          <a:prstGeom prst="rect">
-            <a:avLst/>
-          </a:prstGeom>
-          <a:noFill/>
-        </p:spPr>
-        <p:txBody>
-          <a:bodyPr wrap="square">
-            <a:spAutoFit/>
-          </a:bodyPr>
-          <a:lstStyle/>
-          <a:p>
-            <a:pPr algn="ctr"/>
-            <a:r>
-              <a:rPr sz="4400" b="1" i="0">
+              <a:rPr sz="4800" b="1" i="0">
                 <a:solidFill>
                   <a:srgbClr val="FFFFFF"/>
                 </a:solidFill>
                 <a:latin typeface="Arial"/>
               </a:rPr>
               <a:t>Tu permanecias antes da criação</a:t>
-            </a:r>
-          </a:p>
-        </p:txBody>
-      </p:sp>
-      <p:sp>
-        <p:nvSpPr>
-          <p:cNvPr id="5" name="TextBox 4"/>
-          <p:cNvSpPr txBox="1"/>
-          <p:nvPr/>
-        </p:nvSpPr>
-        <p:spPr>
-          <a:xfrm>
-            <a:off x="594360" y="4251960"/>
-            <a:ext cx="11002975" cy="347472"/>
-          </a:xfrm>
-          <a:prstGeom prst="rect">
-            <a:avLst/>
-          </a:prstGeom>
-          <a:noFill/>
-        </p:spPr>
-        <p:txBody>
-          <a:bodyPr wrap="square">
-            <a:spAutoFit/>
-          </a:bodyPr>
-          <a:lstStyle/>
-          <a:p>
-            <a:pPr algn="ctr"/>
-            <a:r>
-              <a:rPr sz="2200" b="0" i="1">
-                <a:solidFill>
-                  <a:srgbClr val="8C8C8C"/>
-                </a:solidFill>
-                <a:latin typeface="Arial"/>
-              </a:rPr>
-              <a:t/>
             </a:r>
           </a:p>
         </p:txBody>
@@ -3283,8 +3213,8 @@
         </p:nvSpPr>
         <p:spPr>
           <a:xfrm>
-            <a:off x="594360" y="2258568"/>
-            <a:ext cx="11002975" cy="685800"/>
+            <a:off x="640080" y="2052828"/>
+            <a:ext cx="10911535" cy="731520"/>
           </a:xfrm>
           <a:prstGeom prst="rect">
             <a:avLst/>
@@ -3299,7 +3229,7 @@
           <a:p>
             <a:pPr algn="ctr"/>
             <a:r>
-              <a:rPr sz="4400" b="1" i="0">
+              <a:rPr sz="4800" b="1" i="0">
                 <a:solidFill>
                   <a:srgbClr val="FFFFFF"/>
                 </a:solidFill>
@@ -3318,8 +3248,8 @@
         </p:nvSpPr>
         <p:spPr>
           <a:xfrm>
-            <a:off x="594360" y="2980944"/>
-            <a:ext cx="11002975" cy="347472"/>
+            <a:off x="640080" y="2985516"/>
+            <a:ext cx="10911535" cy="731520"/>
           </a:xfrm>
           <a:prstGeom prst="rect">
             <a:avLst/>
@@ -3334,13 +3264,13 @@
           <a:p>
             <a:pPr algn="ctr"/>
             <a:r>
-              <a:rPr sz="2200" b="0" i="1">
-                <a:solidFill>
-                  <a:srgbClr val="8C8C8C"/>
+              <a:rPr sz="4800" b="1" i="0">
+                <a:solidFill>
+                  <a:srgbClr val="FFFFFF"/>
                 </a:solidFill>
                 <a:latin typeface="Arial"/>
               </a:rPr>
-              <a:t>主の　まえに立ち尽くし   手を　あげうたおう</a:t>
+              <a:t>O que eu poderia fazer?</a:t>
             </a:r>
           </a:p>
         </p:txBody>
@@ -3353,8 +3283,8 @@
         </p:nvSpPr>
         <p:spPr>
           <a:xfrm>
-            <a:off x="594360" y="3529584"/>
-            <a:ext cx="11002975" cy="685800"/>
+            <a:off x="640080" y="4128516"/>
+            <a:ext cx="10911535" cy="310896"/>
           </a:xfrm>
           <a:prstGeom prst="rect">
             <a:avLst/>
@@ -3369,13 +3299,13 @@
           <a:p>
             <a:pPr algn="ctr"/>
             <a:r>
-              <a:rPr sz="4400" b="1" i="0">
-                <a:solidFill>
-                  <a:srgbClr val="FFFFFF"/>
+              <a:rPr sz="2000" b="0" i="0">
+                <a:solidFill>
+                  <a:srgbClr val="828282"/>
                 </a:solidFill>
                 <a:latin typeface="Arial"/>
               </a:rPr>
-              <a:t>O que eu poderia fazer?</a:t>
+              <a:t>主の　まえに立ち尽くし   手を　あげうたおう</a:t>
             </a:r>
           </a:p>
         </p:txBody>
@@ -3388,8 +3318,8 @@
         </p:nvSpPr>
         <p:spPr>
           <a:xfrm>
-            <a:off x="594360" y="4251960"/>
-            <a:ext cx="11002975" cy="347472"/>
+            <a:off x="640080" y="4494276"/>
+            <a:ext cx="10911535" cy="310896"/>
           </a:xfrm>
           <a:prstGeom prst="rect">
             <a:avLst/>
@@ -3404,9 +3334,9 @@
           <a:p>
             <a:pPr algn="ctr"/>
             <a:r>
-              <a:rPr sz="2200" b="0" i="1">
-                <a:solidFill>
-                  <a:srgbClr val="8C8C8C"/>
+              <a:rPr sz="2000" b="0" i="0">
+                <a:solidFill>
+                  <a:srgbClr val="828282"/>
                 </a:solidFill>
                 <a:latin typeface="Arial"/>
               </a:rPr>
@@ -3449,8 +3379,8 @@
         </p:nvSpPr>
         <p:spPr>
           <a:xfrm>
-            <a:off x="594360" y="2894076"/>
-            <a:ext cx="11002975" cy="685800"/>
+            <a:off x="640080" y="2702052"/>
+            <a:ext cx="10911535" cy="731520"/>
           </a:xfrm>
           <a:prstGeom prst="rect">
             <a:avLst/>
@@ -3465,7 +3395,7 @@
           <a:p>
             <a:pPr algn="ctr"/>
             <a:r>
-              <a:rPr sz="3705" b="1" i="0">
+              <a:rPr sz="4000" b="1" i="0">
                 <a:solidFill>
                   <a:srgbClr val="FFFFFF"/>
                 </a:solidFill>
@@ -3484,8 +3414,8 @@
         </p:nvSpPr>
         <p:spPr>
           <a:xfrm>
-            <a:off x="594360" y="3616452"/>
-            <a:ext cx="11002975" cy="347472"/>
+            <a:off x="640080" y="3845052"/>
+            <a:ext cx="10911535" cy="310896"/>
           </a:xfrm>
           <a:prstGeom prst="rect">
             <a:avLst/>
@@ -3500,9 +3430,9 @@
           <a:p>
             <a:pPr algn="ctr"/>
             <a:r>
-              <a:rPr sz="2200" b="0" i="1">
-                <a:solidFill>
-                  <a:srgbClr val="8C8C8C"/>
+              <a:rPr sz="2000" b="0" i="0">
+                <a:solidFill>
+                  <a:srgbClr val="828282"/>
                 </a:solidFill>
                 <a:latin typeface="Arial"/>
               </a:rPr>
@@ -3545,8 +3475,8 @@
         </p:nvSpPr>
         <p:spPr>
           <a:xfrm>
-            <a:off x="594360" y="1837944"/>
-            <a:ext cx="11002975" cy="685800"/>
+            <a:off x="640080" y="1650492"/>
+            <a:ext cx="10911535" cy="731520"/>
           </a:xfrm>
           <a:prstGeom prst="rect">
             <a:avLst/>
@@ -3561,7 +3491,7 @@
           <a:p>
             <a:pPr algn="ctr"/>
             <a:r>
-              <a:rPr sz="4400" b="1" i="0">
+              <a:rPr sz="4800" b="1" i="0">
                 <a:solidFill>
                   <a:srgbClr val="FFFFFF"/>
                 </a:solidFill>
@@ -3580,8 +3510,8 @@
         </p:nvSpPr>
         <p:spPr>
           <a:xfrm>
-            <a:off x="594360" y="2560320"/>
-            <a:ext cx="11002975" cy="384048"/>
+            <a:off x="640080" y="2418588"/>
+            <a:ext cx="10911535" cy="365760"/>
           </a:xfrm>
           <a:prstGeom prst="rect">
             <a:avLst/>
@@ -3596,9 +3526,9 @@
           <a:p>
             <a:pPr algn="ctr"/>
             <a:r>
-              <a:rPr sz="2057" b="0" i="1">
-                <a:solidFill>
-                  <a:srgbClr val="B4B4B4"/>
+              <a:rPr sz="2400" b="0" i="1">
+                <a:solidFill>
+                  <a:srgbClr val="AAAAAA"/>
                 </a:solidFill>
                 <a:latin typeface="Arial"/>
               </a:rPr>
@@ -3615,8 +3545,8 @@
         </p:nvSpPr>
         <p:spPr>
           <a:xfrm>
-            <a:off x="594360" y="2980944"/>
-            <a:ext cx="11002975" cy="347472"/>
+            <a:off x="640080" y="2985516"/>
+            <a:ext cx="10911535" cy="731520"/>
           </a:xfrm>
           <a:prstGeom prst="rect">
             <a:avLst/>
@@ -3631,13 +3561,13 @@
           <a:p>
             <a:pPr algn="ctr"/>
             <a:r>
-              <a:rPr sz="2000" b="0" i="1">
-                <a:solidFill>
-                  <a:srgbClr val="8C8C8C"/>
+              <a:rPr sz="4800" b="1" i="0">
+                <a:solidFill>
+                  <a:srgbClr val="FFFFFF"/>
                 </a:solidFill>
                 <a:latin typeface="Arial"/>
               </a:rPr>
-              <a:t>O que eu poderia dizer?</a:t>
+              <a:t>主よ　あなたに 献げます　   全てを</a:t>
             </a:r>
           </a:p>
         </p:txBody>
@@ -3650,8 +3580,8 @@
         </p:nvSpPr>
         <p:spPr>
           <a:xfrm>
-            <a:off x="594360" y="3529584"/>
-            <a:ext cx="11002975" cy="685800"/>
+            <a:off x="640080" y="3753612"/>
+            <a:ext cx="10911535" cy="365760"/>
           </a:xfrm>
           <a:prstGeom prst="rect">
             <a:avLst/>
@@ -3666,13 +3596,13 @@
           <a:p>
             <a:pPr algn="ctr"/>
             <a:r>
-              <a:rPr sz="4400" b="1" i="0">
-                <a:solidFill>
-                  <a:srgbClr val="FFFFFF"/>
+              <a:rPr sz="2400" b="0" i="1">
+                <a:solidFill>
+                  <a:srgbClr val="AAAAAA"/>
                 </a:solidFill>
                 <a:latin typeface="Arial"/>
               </a:rPr>
-              <a:t>主よ　あなたに 献げます　   全てを</a:t>
+              <a:t>Shuyo ana ta-ni sasage mas   subeteo</a:t>
             </a:r>
           </a:p>
         </p:txBody>
@@ -3685,8 +3615,8 @@
         </p:nvSpPr>
         <p:spPr>
           <a:xfrm>
-            <a:off x="594360" y="4251960"/>
-            <a:ext cx="11002975" cy="384048"/>
+            <a:off x="640080" y="4530852"/>
+            <a:ext cx="10911535" cy="310896"/>
           </a:xfrm>
           <a:prstGeom prst="rect">
             <a:avLst/>
@@ -3701,13 +3631,13 @@
           <a:p>
             <a:pPr algn="ctr"/>
             <a:r>
-              <a:rPr sz="2400" b="0" i="1">
-                <a:solidFill>
-                  <a:srgbClr val="B4B4B4"/>
+              <a:rPr sz="2000" b="0" i="1">
+                <a:solidFill>
+                  <a:srgbClr val="828282"/>
                 </a:solidFill>
                 <a:latin typeface="Arial"/>
               </a:rPr>
-              <a:t>Shuyo ana ta-ni sasage mas   subeteo</a:t>
+              <a:t>O que eu poderia dizer?</a:t>
             </a:r>
           </a:p>
         </p:txBody>
@@ -3720,8 +3650,8 @@
         </p:nvSpPr>
         <p:spPr>
           <a:xfrm>
-            <a:off x="594360" y="4672584"/>
-            <a:ext cx="11002975" cy="347472"/>
+            <a:off x="640080" y="4896612"/>
+            <a:ext cx="10911535" cy="310896"/>
           </a:xfrm>
           <a:prstGeom prst="rect">
             <a:avLst/>
@@ -3738,7 +3668,7 @@
             <a:r>
               <a:rPr sz="2000" b="0" i="1">
                 <a:solidFill>
-                  <a:srgbClr val="8C8C8C"/>
+                  <a:srgbClr val="828282"/>
                 </a:solidFill>
                 <a:latin typeface="Arial"/>
               </a:rPr>
@@ -3781,8 +3711,8 @@
         </p:nvSpPr>
         <p:spPr>
           <a:xfrm>
-            <a:off x="594360" y="2683764"/>
-            <a:ext cx="11002975" cy="685800"/>
+            <a:off x="640080" y="2500884"/>
+            <a:ext cx="10911535" cy="731520"/>
           </a:xfrm>
           <a:prstGeom prst="rect">
             <a:avLst/>
@@ -3797,7 +3727,7 @@
           <a:p>
             <a:pPr algn="ctr"/>
             <a:r>
-              <a:rPr sz="4400" b="1" i="0">
+              <a:rPr sz="4800" b="1" i="0">
                 <a:solidFill>
                   <a:srgbClr val="FFFFFF"/>
                 </a:solidFill>
@@ -3816,8 +3746,8 @@
         </p:nvSpPr>
         <p:spPr>
           <a:xfrm>
-            <a:off x="594360" y="3406140"/>
-            <a:ext cx="11002975" cy="384048"/>
+            <a:off x="640080" y="3268980"/>
+            <a:ext cx="10911535" cy="365760"/>
           </a:xfrm>
           <a:prstGeom prst="rect">
             <a:avLst/>
@@ -3834,7 +3764,7 @@
             <a:r>
               <a:rPr sz="2400" b="0" i="1">
                 <a:solidFill>
-                  <a:srgbClr val="B4B4B4"/>
+                  <a:srgbClr val="AAAAAA"/>
                 </a:solidFill>
                 <a:latin typeface="Arial"/>
               </a:rPr>
@@ -3851,8 +3781,8 @@
         </p:nvSpPr>
         <p:spPr>
           <a:xfrm>
-            <a:off x="594360" y="3826764"/>
-            <a:ext cx="11002975" cy="347472"/>
+            <a:off x="640080" y="4046220"/>
+            <a:ext cx="10911535" cy="310896"/>
           </a:xfrm>
           <a:prstGeom prst="rect">
             <a:avLst/>
@@ -3869,7 +3799,7 @@
             <a:r>
               <a:rPr sz="2000" b="0" i="1">
                 <a:solidFill>
-                  <a:srgbClr val="8C8C8C"/>
+                  <a:srgbClr val="828282"/>
                 </a:solidFill>
                 <a:latin typeface="Arial"/>
               </a:rPr>
@@ -3912,8 +3842,8 @@
         </p:nvSpPr>
         <p:spPr>
           <a:xfrm>
-            <a:off x="594360" y="2683764"/>
-            <a:ext cx="11002975" cy="685800"/>
+            <a:off x="640080" y="2500884"/>
+            <a:ext cx="10911535" cy="731520"/>
           </a:xfrm>
           <a:prstGeom prst="rect">
             <a:avLst/>
@@ -3928,7 +3858,7 @@
           <a:p>
             <a:pPr algn="ctr"/>
             <a:r>
-              <a:rPr sz="4400" b="1" i="0">
+              <a:rPr sz="4800" b="1" i="0">
                 <a:solidFill>
                   <a:srgbClr val="FFFFFF"/>
                 </a:solidFill>
@@ -3947,8 +3877,8 @@
         </p:nvSpPr>
         <p:spPr>
           <a:xfrm>
-            <a:off x="594360" y="3406140"/>
-            <a:ext cx="11002975" cy="384048"/>
+            <a:off x="640080" y="3268980"/>
+            <a:ext cx="10911535" cy="365760"/>
           </a:xfrm>
           <a:prstGeom prst="rect">
             <a:avLst/>
@@ -3965,46 +3895,11 @@
             <a:r>
               <a:rPr sz="2400" b="0" i="1">
                 <a:solidFill>
-                  <a:srgbClr val="B4B4B4"/>
+                  <a:srgbClr val="AAAAAA"/>
                 </a:solidFill>
                 <a:latin typeface="Arial"/>
               </a:rPr>
               <a:t>subeteo</a:t>
-            </a:r>
-          </a:p>
-        </p:txBody>
-      </p:sp>
-      <p:sp>
-        <p:nvSpPr>
-          <p:cNvPr id="4" name="TextBox 3"/>
-          <p:cNvSpPr txBox="1"/>
-          <p:nvPr/>
-        </p:nvSpPr>
-        <p:spPr>
-          <a:xfrm>
-            <a:off x="594360" y="3826764"/>
-            <a:ext cx="11002975" cy="347472"/>
-          </a:xfrm>
-          <a:prstGeom prst="rect">
-            <a:avLst/>
-          </a:prstGeom>
-          <a:noFill/>
-        </p:spPr>
-        <p:txBody>
-          <a:bodyPr wrap="square">
-            <a:spAutoFit/>
-          </a:bodyPr>
-          <a:lstStyle/>
-          <a:p>
-            <a:pPr algn="ctr"/>
-            <a:r>
-              <a:rPr sz="2000" b="0" i="1">
-                <a:solidFill>
-                  <a:srgbClr val="8C8C8C"/>
-                </a:solidFill>
-                <a:latin typeface="Arial"/>
-              </a:rPr>
-              <a:t/>
             </a:r>
           </a:p>
         </p:txBody>
@@ -4043,8 +3938,8 @@
         </p:nvSpPr>
         <p:spPr>
           <a:xfrm>
-            <a:off x="594360" y="2258568"/>
-            <a:ext cx="11002975" cy="685800"/>
+            <a:off x="640080" y="2052828"/>
+            <a:ext cx="10911535" cy="731520"/>
           </a:xfrm>
           <a:prstGeom prst="rect">
             <a:avLst/>
@@ -4059,7 +3954,7 @@
           <a:p>
             <a:pPr algn="ctr"/>
             <a:r>
-              <a:rPr sz="4400" b="1" i="0">
+              <a:rPr sz="4800" b="1" i="0">
                 <a:solidFill>
                   <a:srgbClr val="FFFFFF"/>
                 </a:solidFill>
@@ -4078,8 +3973,8 @@
         </p:nvSpPr>
         <p:spPr>
           <a:xfrm>
-            <a:off x="594360" y="2980944"/>
-            <a:ext cx="11002975" cy="347472"/>
+            <a:off x="640080" y="2985516"/>
+            <a:ext cx="10911535" cy="731520"/>
           </a:xfrm>
           <a:prstGeom prst="rect">
             <a:avLst/>
@@ -4094,83 +3989,13 @@
           <a:p>
             <a:pPr algn="ctr"/>
             <a:r>
-              <a:rPr sz="2200" b="0" i="1">
-                <a:solidFill>
-                  <a:srgbClr val="8C8C8C"/>
-                </a:solidFill>
-                <a:latin typeface="Arial"/>
-              </a:rPr>
-              <a:t/>
-            </a:r>
-          </a:p>
-        </p:txBody>
-      </p:sp>
-      <p:sp>
-        <p:nvSpPr>
-          <p:cNvPr id="4" name="TextBox 3"/>
-          <p:cNvSpPr txBox="1"/>
-          <p:nvPr/>
-        </p:nvSpPr>
-        <p:spPr>
-          <a:xfrm>
-            <a:off x="594360" y="3529584"/>
-            <a:ext cx="11002975" cy="685800"/>
-          </a:xfrm>
-          <a:prstGeom prst="rect">
-            <a:avLst/>
-          </a:prstGeom>
-          <a:noFill/>
-        </p:spPr>
-        <p:txBody>
-          <a:bodyPr wrap="square">
-            <a:spAutoFit/>
-          </a:bodyPr>
-          <a:lstStyle/>
-          <a:p>
-            <a:pPr algn="ctr"/>
-            <a:r>
-              <a:rPr sz="4400" b="1" i="0">
+              <a:rPr sz="4800" b="1" i="0">
                 <a:solidFill>
                   <a:srgbClr val="FFFFFF"/>
                 </a:solidFill>
                 <a:latin typeface="Arial"/>
               </a:rPr>
               <a:t>Ordenaste que a Terra se movesse</a:t>
-            </a:r>
-          </a:p>
-        </p:txBody>
-      </p:sp>
-      <p:sp>
-        <p:nvSpPr>
-          <p:cNvPr id="5" name="TextBox 4"/>
-          <p:cNvSpPr txBox="1"/>
-          <p:nvPr/>
-        </p:nvSpPr>
-        <p:spPr>
-          <a:xfrm>
-            <a:off x="594360" y="4251960"/>
-            <a:ext cx="11002975" cy="347472"/>
-          </a:xfrm>
-          <a:prstGeom prst="rect">
-            <a:avLst/>
-          </a:prstGeom>
-          <a:noFill/>
-        </p:spPr>
-        <p:txBody>
-          <a:bodyPr wrap="square">
-            <a:spAutoFit/>
-          </a:bodyPr>
-          <a:lstStyle/>
-          <a:p>
-            <a:pPr algn="ctr"/>
-            <a:r>
-              <a:rPr sz="2200" b="0" i="1">
-                <a:solidFill>
-                  <a:srgbClr val="8C8C8C"/>
-                </a:solidFill>
-                <a:latin typeface="Arial"/>
-              </a:rPr>
-              <a:t/>
             </a:r>
           </a:p>
         </p:txBody>
@@ -4209,8 +4034,8 @@
         </p:nvSpPr>
         <p:spPr>
           <a:xfrm>
-            <a:off x="594360" y="2258568"/>
-            <a:ext cx="11002975" cy="685800"/>
+            <a:off x="640080" y="2052828"/>
+            <a:ext cx="10911535" cy="731520"/>
           </a:xfrm>
           <a:prstGeom prst="rect">
             <a:avLst/>
@@ -4225,7 +4050,7 @@
           <a:p>
             <a:pPr algn="ctr"/>
             <a:r>
-              <a:rPr sz="4400" b="1" i="0">
+              <a:rPr sz="4800" b="1" i="0">
                 <a:solidFill>
                   <a:srgbClr val="FFFFFF"/>
                 </a:solidFill>
@@ -4244,8 +4069,8 @@
         </p:nvSpPr>
         <p:spPr>
           <a:xfrm>
-            <a:off x="594360" y="2980944"/>
-            <a:ext cx="11002975" cy="347472"/>
+            <a:off x="640080" y="2985516"/>
+            <a:ext cx="10911535" cy="731520"/>
           </a:xfrm>
           <a:prstGeom prst="rect">
             <a:avLst/>
@@ -4260,13 +4085,13 @@
           <a:p>
             <a:pPr algn="ctr"/>
             <a:r>
-              <a:rPr sz="2200" b="0" i="1">
-                <a:solidFill>
-                  <a:srgbClr val="8C8C8C"/>
+              <a:rPr sz="4300" b="1" i="0">
+                <a:solidFill>
+                  <a:srgbClr val="FFFFFF"/>
                 </a:solidFill>
                 <a:latin typeface="Arial"/>
               </a:rPr>
-              <a:t>言葉に 　　 できない　  この   心       主に   　献げ-たい</a:t>
+              <a:t>Tu permanecias antes da minha falha</a:t>
             </a:r>
           </a:p>
         </p:txBody>
@@ -4279,8 +4104,8 @@
         </p:nvSpPr>
         <p:spPr>
           <a:xfrm>
-            <a:off x="594360" y="3529584"/>
-            <a:ext cx="11002975" cy="685800"/>
+            <a:off x="640080" y="4128516"/>
+            <a:ext cx="10911535" cy="310896"/>
           </a:xfrm>
           <a:prstGeom prst="rect">
             <a:avLst/>
@@ -4295,13 +4120,13 @@
           <a:p>
             <a:pPr algn="ctr"/>
             <a:r>
-              <a:rPr sz="4022" b="1" i="0">
-                <a:solidFill>
-                  <a:srgbClr val="FFFFFF"/>
+              <a:rPr sz="2000" b="0" i="0">
+                <a:solidFill>
+                  <a:srgbClr val="828282"/>
                 </a:solidFill>
                 <a:latin typeface="Arial"/>
               </a:rPr>
-              <a:t>Tu permanecias antes da minha falha</a:t>
+              <a:t>言葉に 　　 できない　  この   心       主に   　献げ-たい</a:t>
             </a:r>
           </a:p>
         </p:txBody>
@@ -4314,8 +4139,8 @@
         </p:nvSpPr>
         <p:spPr>
           <a:xfrm>
-            <a:off x="594360" y="4251960"/>
-            <a:ext cx="11002975" cy="347472"/>
+            <a:off x="640080" y="4494276"/>
+            <a:ext cx="10911535" cy="310896"/>
           </a:xfrm>
           <a:prstGeom prst="rect">
             <a:avLst/>
@@ -4330,9 +4155,9 @@
           <a:p>
             <a:pPr algn="ctr"/>
             <a:r>
-              <a:rPr sz="2200" b="0" i="1">
-                <a:solidFill>
-                  <a:srgbClr val="8C8C8C"/>
+              <a:rPr sz="2000" b="0" i="0">
+                <a:solidFill>
+                  <a:srgbClr val="828282"/>
                 </a:solidFill>
                 <a:latin typeface="Arial"/>
               </a:rPr>
@@ -4375,8 +4200,8 @@
         </p:nvSpPr>
         <p:spPr>
           <a:xfrm>
-            <a:off x="594360" y="2258568"/>
-            <a:ext cx="11002975" cy="685800"/>
+            <a:off x="640080" y="2052828"/>
+            <a:ext cx="10911535" cy="731520"/>
           </a:xfrm>
           <a:prstGeom prst="rect">
             <a:avLst/>
@@ -4391,7 +4216,7 @@
           <a:p>
             <a:pPr algn="ctr"/>
             <a:r>
-              <a:rPr sz="3911" b="1" i="0">
+              <a:rPr sz="4200" b="1" i="0">
                 <a:solidFill>
                   <a:srgbClr val="FFFFFF"/>
                 </a:solidFill>
@@ -4410,8 +4235,8 @@
         </p:nvSpPr>
         <p:spPr>
           <a:xfrm>
-            <a:off x="594360" y="2980944"/>
-            <a:ext cx="11002975" cy="347472"/>
+            <a:off x="640080" y="2985516"/>
+            <a:ext cx="10911535" cy="731520"/>
           </a:xfrm>
           <a:prstGeom prst="rect">
             <a:avLst/>
@@ -4426,83 +4251,13 @@
           <a:p>
             <a:pPr algn="ctr"/>
             <a:r>
-              <a:rPr sz="2200" b="0" i="1">
-                <a:solidFill>
-                  <a:srgbClr val="8C8C8C"/>
-                </a:solidFill>
-                <a:latin typeface="Arial"/>
-              </a:rPr>
-              <a:t/>
-            </a:r>
-          </a:p>
-        </p:txBody>
-      </p:sp>
-      <p:sp>
-        <p:nvSpPr>
-          <p:cNvPr id="4" name="TextBox 3"/>
-          <p:cNvSpPr txBox="1"/>
-          <p:nvPr/>
-        </p:nvSpPr>
-        <p:spPr>
-          <a:xfrm>
-            <a:off x="594360" y="3529584"/>
-            <a:ext cx="11002975" cy="685800"/>
-          </a:xfrm>
-          <a:prstGeom prst="rect">
-            <a:avLst/>
-          </a:prstGeom>
-          <a:noFill/>
-        </p:spPr>
-        <p:txBody>
-          <a:bodyPr wrap="square">
-            <a:spAutoFit/>
-          </a:bodyPr>
-          <a:lstStyle/>
-          <a:p>
-            <a:pPr algn="ctr"/>
-            <a:r>
-              <a:rPr sz="3805" b="1" i="0">
+              <a:rPr sz="4100" b="1" i="0">
                 <a:solidFill>
                   <a:srgbClr val="FFFFFF"/>
                 </a:solidFill>
                 <a:latin typeface="Arial"/>
               </a:rPr>
               <a:t>Meu pecado pesou sobre os Teus ombros</a:t>
-            </a:r>
-          </a:p>
-        </p:txBody>
-      </p:sp>
-      <p:sp>
-        <p:nvSpPr>
-          <p:cNvPr id="5" name="TextBox 4"/>
-          <p:cNvSpPr txBox="1"/>
-          <p:nvPr/>
-        </p:nvSpPr>
-        <p:spPr>
-          <a:xfrm>
-            <a:off x="594360" y="4251960"/>
-            <a:ext cx="11002975" cy="347472"/>
-          </a:xfrm>
-          <a:prstGeom prst="rect">
-            <a:avLst/>
-          </a:prstGeom>
-          <a:noFill/>
-        </p:spPr>
-        <p:txBody>
-          <a:bodyPr wrap="square">
-            <a:spAutoFit/>
-          </a:bodyPr>
-          <a:lstStyle/>
-          <a:p>
-            <a:pPr algn="ctr"/>
-            <a:r>
-              <a:rPr sz="2200" b="0" i="1">
-                <a:solidFill>
-                  <a:srgbClr val="8C8C8C"/>
-                </a:solidFill>
-                <a:latin typeface="Arial"/>
-              </a:rPr>
-              <a:t/>
             </a:r>
           </a:p>
         </p:txBody>
@@ -4541,8 +4296,8 @@
         </p:nvSpPr>
         <p:spPr>
           <a:xfrm>
-            <a:off x="594360" y="2683764"/>
-            <a:ext cx="11002975" cy="685800"/>
+            <a:off x="640080" y="2500884"/>
+            <a:ext cx="10911535" cy="731520"/>
           </a:xfrm>
           <a:prstGeom prst="rect">
             <a:avLst/>
@@ -4557,7 +4312,7 @@
           <a:p>
             <a:pPr algn="ctr"/>
             <a:r>
-              <a:rPr sz="2778" b="1" i="0">
+              <a:rPr sz="3000" b="1" i="0">
                 <a:solidFill>
                   <a:srgbClr val="FFFFFF"/>
                 </a:solidFill>
@@ -4576,8 +4331,8 @@
         </p:nvSpPr>
         <p:spPr>
           <a:xfrm>
-            <a:off x="594360" y="3406140"/>
-            <a:ext cx="11002975" cy="384048"/>
+            <a:off x="640080" y="3268980"/>
+            <a:ext cx="10911535" cy="365760"/>
           </a:xfrm>
           <a:prstGeom prst="rect">
             <a:avLst/>
@@ -4592,9 +4347,9 @@
           <a:p>
             <a:pPr algn="ctr"/>
             <a:r>
-              <a:rPr sz="1292" b="0" i="1">
-                <a:solidFill>
-                  <a:srgbClr val="B4B4B4"/>
+              <a:rPr sz="1600" b="0" i="1">
+                <a:solidFill>
+                  <a:srgbClr val="AAAAAA"/>
                 </a:solidFill>
                 <a:latin typeface="Arial"/>
               </a:rPr>
@@ -4611,8 +4366,8 @@
         </p:nvSpPr>
         <p:spPr>
           <a:xfrm>
-            <a:off x="594360" y="3826764"/>
-            <a:ext cx="11002975" cy="347472"/>
+            <a:off x="640080" y="4046220"/>
+            <a:ext cx="10911535" cy="310896"/>
           </a:xfrm>
           <a:prstGeom prst="rect">
             <a:avLst/>
@@ -4629,7 +4384,7 @@
             <a:r>
               <a:rPr sz="2000" b="0" i="1">
                 <a:solidFill>
-                  <a:srgbClr val="8C8C8C"/>
+                  <a:srgbClr val="828282"/>
                 </a:solidFill>
                 <a:latin typeface="Arial"/>
               </a:rPr>
@@ -4672,8 +4427,8 @@
         </p:nvSpPr>
         <p:spPr>
           <a:xfrm>
-            <a:off x="594360" y="2683764"/>
-            <a:ext cx="11002975" cy="685800"/>
+            <a:off x="640080" y="2500884"/>
+            <a:ext cx="10911535" cy="731520"/>
           </a:xfrm>
           <a:prstGeom prst="rect">
             <a:avLst/>
@@ -4688,7 +4443,7 @@
           <a:p>
             <a:pPr algn="ctr"/>
             <a:r>
-              <a:rPr sz="2400" b="1" i="0">
+              <a:rPr sz="2600" b="1" i="0">
                 <a:solidFill>
                   <a:srgbClr val="FFFFFF"/>
                 </a:solidFill>
@@ -4707,8 +4462,8 @@
         </p:nvSpPr>
         <p:spPr>
           <a:xfrm>
-            <a:off x="594360" y="3406140"/>
-            <a:ext cx="11002975" cy="384048"/>
+            <a:off x="640080" y="3268980"/>
+            <a:ext cx="10911535" cy="365760"/>
           </a:xfrm>
           <a:prstGeom prst="rect">
             <a:avLst/>
@@ -4723,9 +4478,9 @@
           <a:p>
             <a:pPr algn="ctr"/>
             <a:r>
-              <a:rPr sz="1575" b="0" i="1">
-                <a:solidFill>
-                  <a:srgbClr val="B4B4B4"/>
+              <a:rPr sz="1900" b="0" i="1">
+                <a:solidFill>
+                  <a:srgbClr val="AAAAAA"/>
                 </a:solidFill>
                 <a:latin typeface="Arial"/>
               </a:rPr>
@@ -4742,8 +4497,8 @@
         </p:nvSpPr>
         <p:spPr>
           <a:xfrm>
-            <a:off x="594360" y="3826764"/>
-            <a:ext cx="11002975" cy="347472"/>
+            <a:off x="640080" y="4046220"/>
+            <a:ext cx="10911535" cy="310896"/>
           </a:xfrm>
           <a:prstGeom prst="rect">
             <a:avLst/>
@@ -4760,11 +4515,11 @@
             <a:r>
               <a:rPr sz="2000" b="0" i="1">
                 <a:solidFill>
-                  <a:srgbClr val="8C8C8C"/>
+                  <a:srgbClr val="828282"/>
                 </a:solidFill>
                 <a:latin typeface="Arial"/>
               </a:rPr>
-              <a:t/>
+              <a:t>Permanecer</a:t>
             </a:r>
           </a:p>
         </p:txBody>
@@ -4803,8 +4558,8 @@
         </p:nvSpPr>
         <p:spPr>
           <a:xfrm>
-            <a:off x="594360" y="2683764"/>
-            <a:ext cx="11002975" cy="685800"/>
+            <a:off x="640080" y="2500884"/>
+            <a:ext cx="10911535" cy="731520"/>
           </a:xfrm>
           <a:prstGeom prst="rect">
             <a:avLst/>
@@ -4819,7 +4574,7 @@
           <a:p>
             <a:pPr algn="ctr"/>
             <a:r>
-              <a:rPr sz="2778" b="1" i="0">
+              <a:rPr sz="3000" b="1" i="0">
                 <a:solidFill>
                   <a:srgbClr val="FFFFFF"/>
                 </a:solidFill>
@@ -4838,8 +4593,8 @@
         </p:nvSpPr>
         <p:spPr>
           <a:xfrm>
-            <a:off x="594360" y="3406140"/>
-            <a:ext cx="11002975" cy="384048"/>
+            <a:off x="640080" y="3268980"/>
+            <a:ext cx="10911535" cy="365760"/>
           </a:xfrm>
           <a:prstGeom prst="rect">
             <a:avLst/>
@@ -4854,9 +4609,9 @@
           <a:p>
             <a:pPr algn="ctr"/>
             <a:r>
-              <a:rPr sz="1292" b="0" i="1">
-                <a:solidFill>
-                  <a:srgbClr val="B4B4B4"/>
+              <a:rPr sz="1600" b="0" i="1">
+                <a:solidFill>
+                  <a:srgbClr val="AAAAAA"/>
                 </a:solidFill>
                 <a:latin typeface="Arial"/>
               </a:rPr>
@@ -4873,8 +4628,8 @@
         </p:nvSpPr>
         <p:spPr>
           <a:xfrm>
-            <a:off x="594360" y="3826764"/>
-            <a:ext cx="11002975" cy="347472"/>
+            <a:off x="640080" y="4046220"/>
+            <a:ext cx="10911535" cy="310896"/>
           </a:xfrm>
           <a:prstGeom prst="rect">
             <a:avLst/>
@@ -4891,7 +4646,7 @@
             <a:r>
               <a:rPr sz="2000" b="0" i="1">
                 <a:solidFill>
-                  <a:srgbClr val="8C8C8C"/>
+                  <a:srgbClr val="828282"/>
                 </a:solidFill>
                 <a:latin typeface="Arial"/>
               </a:rPr>
@@ -4934,8 +4689,8 @@
         </p:nvSpPr>
         <p:spPr>
           <a:xfrm>
-            <a:off x="594360" y="2258568"/>
-            <a:ext cx="11002975" cy="685800"/>
+            <a:off x="640080" y="2052828"/>
+            <a:ext cx="10911535" cy="731520"/>
           </a:xfrm>
           <a:prstGeom prst="rect">
             <a:avLst/>
@@ -4950,7 +4705,7 @@
           <a:p>
             <a:pPr algn="ctr"/>
             <a:r>
-              <a:rPr sz="4400" b="1" i="0">
+              <a:rPr sz="4800" b="1" i="0">
                 <a:solidFill>
                   <a:srgbClr val="FFFFFF"/>
                 </a:solidFill>
@@ -4969,8 +4724,8 @@
         </p:nvSpPr>
         <p:spPr>
           <a:xfrm>
-            <a:off x="594360" y="2980944"/>
-            <a:ext cx="11002975" cy="347472"/>
+            <a:off x="640080" y="2985516"/>
+            <a:ext cx="10911535" cy="731520"/>
           </a:xfrm>
           <a:prstGeom prst="rect">
             <a:avLst/>
@@ -4985,13 +4740,13 @@
           <a:p>
             <a:pPr algn="ctr"/>
             <a:r>
-              <a:rPr sz="2200" b="0" i="1">
-                <a:solidFill>
-                  <a:srgbClr val="8C8C8C"/>
+              <a:rPr sz="4300" b="1" i="0">
+                <a:solidFill>
+                  <a:srgbClr val="FFFFFF"/>
                 </a:solidFill>
                 <a:latin typeface="Arial"/>
               </a:rPr>
-              <a:t>言葉に 　　 できない　  この   心       主に   　献げ-たい</a:t>
+              <a:t>Tu permanecias antes da minha falha</a:t>
             </a:r>
           </a:p>
         </p:txBody>
@@ -5004,8 +4759,8 @@
         </p:nvSpPr>
         <p:spPr>
           <a:xfrm>
-            <a:off x="594360" y="3529584"/>
-            <a:ext cx="11002975" cy="685800"/>
+            <a:off x="640080" y="4128516"/>
+            <a:ext cx="10911535" cy="310896"/>
           </a:xfrm>
           <a:prstGeom prst="rect">
             <a:avLst/>
@@ -5020,13 +4775,13 @@
           <a:p>
             <a:pPr algn="ctr"/>
             <a:r>
-              <a:rPr sz="4022" b="1" i="0">
-                <a:solidFill>
-                  <a:srgbClr val="FFFFFF"/>
+              <a:rPr sz="2000" b="0" i="0">
+                <a:solidFill>
+                  <a:srgbClr val="828282"/>
                 </a:solidFill>
                 <a:latin typeface="Arial"/>
               </a:rPr>
-              <a:t>Tu permanecias antes da minha falha</a:t>
+              <a:t>言葉に 　　 できない　  この   心       主に   　献げ-たい</a:t>
             </a:r>
           </a:p>
         </p:txBody>
@@ -5039,8 +4794,8 @@
         </p:nvSpPr>
         <p:spPr>
           <a:xfrm>
-            <a:off x="594360" y="4251960"/>
-            <a:ext cx="11002975" cy="347472"/>
+            <a:off x="640080" y="4494276"/>
+            <a:ext cx="10911535" cy="310896"/>
           </a:xfrm>
           <a:prstGeom prst="rect">
             <a:avLst/>
@@ -5055,9 +4810,9 @@
           <a:p>
             <a:pPr algn="ctr"/>
             <a:r>
-              <a:rPr sz="2200" b="0" i="1">
-                <a:solidFill>
-                  <a:srgbClr val="8C8C8C"/>
+              <a:rPr sz="2000" b="0" i="0">
+                <a:solidFill>
+                  <a:srgbClr val="828282"/>
                 </a:solidFill>
                 <a:latin typeface="Arial"/>
               </a:rPr>
@@ -5100,8 +4855,8 @@
         </p:nvSpPr>
         <p:spPr>
           <a:xfrm>
-            <a:off x="594360" y="2258568"/>
-            <a:ext cx="11002975" cy="685800"/>
+            <a:off x="640080" y="2052828"/>
+            <a:ext cx="10911535" cy="731520"/>
           </a:xfrm>
           <a:prstGeom prst="rect">
             <a:avLst/>
@@ -5116,7 +4871,7 @@
           <a:p>
             <a:pPr algn="ctr"/>
             <a:r>
-              <a:rPr sz="3911" b="1" i="0">
+              <a:rPr sz="4200" b="1" i="0">
                 <a:solidFill>
                   <a:srgbClr val="FFFFFF"/>
                 </a:solidFill>
@@ -5135,8 +4890,8 @@
         </p:nvSpPr>
         <p:spPr>
           <a:xfrm>
-            <a:off x="594360" y="2980944"/>
-            <a:ext cx="11002975" cy="347472"/>
+            <a:off x="640080" y="2985516"/>
+            <a:ext cx="10911535" cy="731520"/>
           </a:xfrm>
           <a:prstGeom prst="rect">
             <a:avLst/>
@@ -5151,83 +4906,13 @@
           <a:p>
             <a:pPr algn="ctr"/>
             <a:r>
-              <a:rPr sz="2200" b="0" i="1">
-                <a:solidFill>
-                  <a:srgbClr val="8C8C8C"/>
-                </a:solidFill>
-                <a:latin typeface="Arial"/>
-              </a:rPr>
-              <a:t/>
-            </a:r>
-          </a:p>
-        </p:txBody>
-      </p:sp>
-      <p:sp>
-        <p:nvSpPr>
-          <p:cNvPr id="4" name="TextBox 3"/>
-          <p:cNvSpPr txBox="1"/>
-          <p:nvPr/>
-        </p:nvSpPr>
-        <p:spPr>
-          <a:xfrm>
-            <a:off x="594360" y="3529584"/>
-            <a:ext cx="11002975" cy="685800"/>
-          </a:xfrm>
-          <a:prstGeom prst="rect">
-            <a:avLst/>
-          </a:prstGeom>
-          <a:noFill/>
-        </p:spPr>
-        <p:txBody>
-          <a:bodyPr wrap="square">
-            <a:spAutoFit/>
-          </a:bodyPr>
-          <a:lstStyle/>
-          <a:p>
-            <a:pPr algn="ctr"/>
-            <a:r>
-              <a:rPr sz="3805" b="1" i="0">
+              <a:rPr sz="4100" b="1" i="0">
                 <a:solidFill>
                   <a:srgbClr val="FFFFFF"/>
                 </a:solidFill>
                 <a:latin typeface="Arial"/>
               </a:rPr>
               <a:t>Meu pecado pesou sobre os Teus ombros</a:t>
-            </a:r>
-          </a:p>
-        </p:txBody>
-      </p:sp>
-      <p:sp>
-        <p:nvSpPr>
-          <p:cNvPr id="5" name="TextBox 4"/>
-          <p:cNvSpPr txBox="1"/>
-          <p:nvPr/>
-        </p:nvSpPr>
-        <p:spPr>
-          <a:xfrm>
-            <a:off x="594360" y="4251960"/>
-            <a:ext cx="11002975" cy="347472"/>
-          </a:xfrm>
-          <a:prstGeom prst="rect">
-            <a:avLst/>
-          </a:prstGeom>
-          <a:noFill/>
-        </p:spPr>
-        <p:txBody>
-          <a:bodyPr wrap="square">
-            <a:spAutoFit/>
-          </a:bodyPr>
-          <a:lstStyle/>
-          <a:p>
-            <a:pPr algn="ctr"/>
-            <a:r>
-              <a:rPr sz="2200" b="0" i="1">
-                <a:solidFill>
-                  <a:srgbClr val="8C8C8C"/>
-                </a:solidFill>
-                <a:latin typeface="Arial"/>
-              </a:rPr>
-              <a:t/>
             </a:r>
           </a:p>
         </p:txBody>

--- a/output_pptx/The_Stand.pptx
+++ b/output_pptx/The_Stand.pptx
@@ -3179,6 +3179,76 @@
           </a:p>
         </p:txBody>
       </p:sp>
+      <p:sp>
+        <p:nvSpPr>
+          <p:cNvPr id="4" name="TextBox 3"/>
+          <p:cNvSpPr txBox="1"/>
+          <p:nvPr/>
+        </p:nvSpPr>
+        <p:spPr>
+          <a:xfrm>
+            <a:off x="640080" y="4128516"/>
+            <a:ext cx="10911535" cy="310896"/>
+          </a:xfrm>
+          <a:prstGeom prst="rect">
+            <a:avLst/>
+          </a:prstGeom>
+          <a:noFill/>
+        </p:spPr>
+        <p:txBody>
+          <a:bodyPr wrap="square">
+            <a:spAutoFit/>
+          </a:bodyPr>
+          <a:lstStyle/>
+          <a:p>
+            <a:pPr algn="ctr"/>
+            <a:r>
+              <a:rPr sz="2000" b="0" i="0">
+                <a:solidFill>
+                  <a:srgbClr val="828282"/>
+                </a:solidFill>
+                <a:latin typeface="Arial"/>
+              </a:rPr>
+              <a:t>とどまる</a:t>
+            </a:r>
+          </a:p>
+        </p:txBody>
+      </p:sp>
+      <p:sp>
+        <p:nvSpPr>
+          <p:cNvPr id="5" name="TextBox 4"/>
+          <p:cNvSpPr txBox="1"/>
+          <p:nvPr/>
+        </p:nvSpPr>
+        <p:spPr>
+          <a:xfrm>
+            <a:off x="640080" y="4494276"/>
+            <a:ext cx="10911535" cy="310896"/>
+          </a:xfrm>
+          <a:prstGeom prst="rect">
+            <a:avLst/>
+          </a:prstGeom>
+          <a:noFill/>
+        </p:spPr>
+        <p:txBody>
+          <a:bodyPr wrap="square">
+            <a:spAutoFit/>
+          </a:bodyPr>
+          <a:lstStyle/>
+          <a:p>
+            <a:pPr algn="ctr"/>
+            <a:r>
+              <a:rPr sz="2000" b="0" i="0">
+                <a:solidFill>
+                  <a:srgbClr val="828282"/>
+                </a:solidFill>
+                <a:latin typeface="Arial"/>
+              </a:rPr>
+              <a:t>あなたは創造の前からずっとおられた</a:t>
+            </a:r>
+          </a:p>
+        </p:txBody>
+      </p:sp>
     </p:spTree>
   </p:cSld>
   <p:clrMapOvr>
@@ -3904,6 +3974,41 @@
           </a:p>
         </p:txBody>
       </p:sp>
+      <p:sp>
+        <p:nvSpPr>
+          <p:cNvPr id="4" name="TextBox 3"/>
+          <p:cNvSpPr txBox="1"/>
+          <p:nvPr/>
+        </p:nvSpPr>
+        <p:spPr>
+          <a:xfrm>
+            <a:off x="640080" y="4046220"/>
+            <a:ext cx="10911535" cy="310896"/>
+          </a:xfrm>
+          <a:prstGeom prst="rect">
+            <a:avLst/>
+          </a:prstGeom>
+          <a:noFill/>
+        </p:spPr>
+        <p:txBody>
+          <a:bodyPr wrap="square">
+            <a:spAutoFit/>
+          </a:bodyPr>
+          <a:lstStyle/>
+          <a:p>
+            <a:pPr algn="ctr"/>
+            <a:r>
+              <a:rPr sz="2000" b="0" i="1">
+                <a:solidFill>
+                  <a:srgbClr val="828282"/>
+                </a:solidFill>
+                <a:latin typeface="Arial"/>
+              </a:rPr>
+              <a:t>Tudo</a:t>
+            </a:r>
+          </a:p>
+        </p:txBody>
+      </p:sp>
     </p:spTree>
   </p:cSld>
   <p:clrMapOvr>
@@ -4000,6 +4105,76 @@
           </a:p>
         </p:txBody>
       </p:sp>
+      <p:sp>
+        <p:nvSpPr>
+          <p:cNvPr id="4" name="TextBox 3"/>
+          <p:cNvSpPr txBox="1"/>
+          <p:nvPr/>
+        </p:nvSpPr>
+        <p:spPr>
+          <a:xfrm>
+            <a:off x="640080" y="4128516"/>
+            <a:ext cx="10911535" cy="310896"/>
+          </a:xfrm>
+          <a:prstGeom prst="rect">
+            <a:avLst/>
+          </a:prstGeom>
+          <a:noFill/>
+        </p:spPr>
+        <p:txBody>
+          <a:bodyPr wrap="square">
+            <a:spAutoFit/>
+          </a:bodyPr>
+          <a:lstStyle/>
+          <a:p>
+            <a:pPr algn="ctr"/>
+            <a:r>
+              <a:rPr sz="2000" b="0" i="0">
+                <a:solidFill>
+                  <a:srgbClr val="828282"/>
+                </a:solidFill>
+                <a:latin typeface="Arial"/>
+              </a:rPr>
+              <a:t>永遠があなたの手の中に</a:t>
+            </a:r>
+          </a:p>
+        </p:txBody>
+      </p:sp>
+      <p:sp>
+        <p:nvSpPr>
+          <p:cNvPr id="5" name="TextBox 4"/>
+          <p:cNvSpPr txBox="1"/>
+          <p:nvPr/>
+        </p:nvSpPr>
+        <p:spPr>
+          <a:xfrm>
+            <a:off x="640080" y="4494276"/>
+            <a:ext cx="10911535" cy="310896"/>
+          </a:xfrm>
+          <a:prstGeom prst="rect">
+            <a:avLst/>
+          </a:prstGeom>
+          <a:noFill/>
+        </p:spPr>
+        <p:txBody>
+          <a:bodyPr wrap="square">
+            <a:spAutoFit/>
+          </a:bodyPr>
+          <a:lstStyle/>
+          <a:p>
+            <a:pPr algn="ctr"/>
+            <a:r>
+              <a:rPr sz="2000" b="0" i="0">
+                <a:solidFill>
+                  <a:srgbClr val="828282"/>
+                </a:solidFill>
+                <a:latin typeface="Arial"/>
+              </a:rPr>
+              <a:t>あなたは地が動くよう命じられた</a:t>
+            </a:r>
+          </a:p>
+        </p:txBody>
+      </p:sp>
     </p:spTree>
   </p:cSld>
   <p:clrMapOvr>
@@ -4262,6 +4437,76 @@
           </a:p>
         </p:txBody>
       </p:sp>
+      <p:sp>
+        <p:nvSpPr>
+          <p:cNvPr id="4" name="TextBox 3"/>
+          <p:cNvSpPr txBox="1"/>
+          <p:nvPr/>
+        </p:nvSpPr>
+        <p:spPr>
+          <a:xfrm>
+            <a:off x="640080" y="4128516"/>
+            <a:ext cx="10911535" cy="310896"/>
+          </a:xfrm>
+          <a:prstGeom prst="rect">
+            <a:avLst/>
+          </a:prstGeom>
+          <a:noFill/>
+        </p:spPr>
+        <p:txBody>
+          <a:bodyPr wrap="square">
+            <a:spAutoFit/>
+          </a:bodyPr>
+          <a:lstStyle/>
+          <a:p>
+            <a:pPr algn="ctr"/>
+            <a:r>
+              <a:rPr sz="2000" b="0" i="0">
+                <a:solidFill>
+                  <a:srgbClr val="828282"/>
+                </a:solidFill>
+                <a:latin typeface="Arial"/>
+              </a:rPr>
+              <a:t>あなたは私の恥のために十字架を負われた</a:t>
+            </a:r>
+          </a:p>
+        </p:txBody>
+      </p:sp>
+      <p:sp>
+        <p:nvSpPr>
+          <p:cNvPr id="5" name="TextBox 4"/>
+          <p:cNvSpPr txBox="1"/>
+          <p:nvPr/>
+        </p:nvSpPr>
+        <p:spPr>
+          <a:xfrm>
+            <a:off x="640080" y="4494276"/>
+            <a:ext cx="10911535" cy="310896"/>
+          </a:xfrm>
+          <a:prstGeom prst="rect">
+            <a:avLst/>
+          </a:prstGeom>
+          <a:noFill/>
+        </p:spPr>
+        <p:txBody>
+          <a:bodyPr wrap="square">
+            <a:spAutoFit/>
+          </a:bodyPr>
+          <a:lstStyle/>
+          <a:p>
+            <a:pPr algn="ctr"/>
+            <a:r>
+              <a:rPr sz="2000" b="0" i="0">
+                <a:solidFill>
+                  <a:srgbClr val="828282"/>
+                </a:solidFill>
+                <a:latin typeface="Arial"/>
+              </a:rPr>
+              <a:t>私の罪があなたの肩の上に重くのしかかった</a:t>
+            </a:r>
+          </a:p>
+        </p:txBody>
+      </p:sp>
     </p:spTree>
   </p:cSld>
   <p:clrMapOvr>
@@ -4913,6 +5158,76 @@
                 <a:latin typeface="Arial"/>
               </a:rPr>
               <a:t>Meu pecado pesou sobre os Teus ombros</a:t>
+            </a:r>
+          </a:p>
+        </p:txBody>
+      </p:sp>
+      <p:sp>
+        <p:nvSpPr>
+          <p:cNvPr id="4" name="TextBox 3"/>
+          <p:cNvSpPr txBox="1"/>
+          <p:nvPr/>
+        </p:nvSpPr>
+        <p:spPr>
+          <a:xfrm>
+            <a:off x="640080" y="4128516"/>
+            <a:ext cx="10911535" cy="310896"/>
+          </a:xfrm>
+          <a:prstGeom prst="rect">
+            <a:avLst/>
+          </a:prstGeom>
+          <a:noFill/>
+        </p:spPr>
+        <p:txBody>
+          <a:bodyPr wrap="square">
+            <a:spAutoFit/>
+          </a:bodyPr>
+          <a:lstStyle/>
+          <a:p>
+            <a:pPr algn="ctr"/>
+            <a:r>
+              <a:rPr sz="2000" b="0" i="0">
+                <a:solidFill>
+                  <a:srgbClr val="828282"/>
+                </a:solidFill>
+                <a:latin typeface="Arial"/>
+              </a:rPr>
+              <a:t>あなたは私の恥のために十字架を負われた</a:t>
+            </a:r>
+          </a:p>
+        </p:txBody>
+      </p:sp>
+      <p:sp>
+        <p:nvSpPr>
+          <p:cNvPr id="5" name="TextBox 4"/>
+          <p:cNvSpPr txBox="1"/>
+          <p:nvPr/>
+        </p:nvSpPr>
+        <p:spPr>
+          <a:xfrm>
+            <a:off x="640080" y="4494276"/>
+            <a:ext cx="10911535" cy="310896"/>
+          </a:xfrm>
+          <a:prstGeom prst="rect">
+            <a:avLst/>
+          </a:prstGeom>
+          <a:noFill/>
+        </p:spPr>
+        <p:txBody>
+          <a:bodyPr wrap="square">
+            <a:spAutoFit/>
+          </a:bodyPr>
+          <a:lstStyle/>
+          <a:p>
+            <a:pPr algn="ctr"/>
+            <a:r>
+              <a:rPr sz="2000" b="0" i="0">
+                <a:solidFill>
+                  <a:srgbClr val="828282"/>
+                </a:solidFill>
+                <a:latin typeface="Arial"/>
+              </a:rPr>
+              <a:t>私の罪があなたの肩の上に重くのしかかった</a:t>
             </a:r>
           </a:p>
         </p:txBody>
